--- a/Normalization/Normalization.pptx
+++ b/Normalization/Normalization.pptx
@@ -104,6 +104,11 @@
       </a:defRPr>
     </a:lvl9pPr>
   </p:defaultTextStyle>
+  <p:extLst>
+    <p:ext uri="{EFAFB233-063F-42B5-8137-9DF3F51BA10A}">
+      <p15:sldGuideLst xmlns:p15="http://schemas.microsoft.com/office/powerpoint/2012/main"/>
+    </p:ext>
+  </p:extLst>
 </p:presentation>
 </file>
 
@@ -254,7 +259,7 @@
           <a:p>
             <a:fld id="{71508FFD-BCE4-46BF-8881-AE560EAB6C52}" type="datetimeFigureOut">
               <a:rPr lang="zh-TW" altLang="en-US" smtClean="0"/>
-              <a:t>2025/5/1</a:t>
+              <a:t>2025/5/2</a:t>
             </a:fld>
             <a:endParaRPr lang="zh-TW" altLang="en-US"/>
           </a:p>
@@ -452,7 +457,7 @@
           <a:p>
             <a:fld id="{71508FFD-BCE4-46BF-8881-AE560EAB6C52}" type="datetimeFigureOut">
               <a:rPr lang="zh-TW" altLang="en-US" smtClean="0"/>
-              <a:t>2025/5/1</a:t>
+              <a:t>2025/5/2</a:t>
             </a:fld>
             <a:endParaRPr lang="zh-TW" altLang="en-US"/>
           </a:p>
@@ -660,7 +665,7 @@
           <a:p>
             <a:fld id="{71508FFD-BCE4-46BF-8881-AE560EAB6C52}" type="datetimeFigureOut">
               <a:rPr lang="zh-TW" altLang="en-US" smtClean="0"/>
-              <a:t>2025/5/1</a:t>
+              <a:t>2025/5/2</a:t>
             </a:fld>
             <a:endParaRPr lang="zh-TW" altLang="en-US"/>
           </a:p>
@@ -858,7 +863,7 @@
           <a:p>
             <a:fld id="{71508FFD-BCE4-46BF-8881-AE560EAB6C52}" type="datetimeFigureOut">
               <a:rPr lang="zh-TW" altLang="en-US" smtClean="0"/>
-              <a:t>2025/5/1</a:t>
+              <a:t>2025/5/2</a:t>
             </a:fld>
             <a:endParaRPr lang="zh-TW" altLang="en-US"/>
           </a:p>
@@ -1133,7 +1138,7 @@
           <a:p>
             <a:fld id="{71508FFD-BCE4-46BF-8881-AE560EAB6C52}" type="datetimeFigureOut">
               <a:rPr lang="zh-TW" altLang="en-US" smtClean="0"/>
-              <a:t>2025/5/1</a:t>
+              <a:t>2025/5/2</a:t>
             </a:fld>
             <a:endParaRPr lang="zh-TW" altLang="en-US"/>
           </a:p>
@@ -1398,7 +1403,7 @@
           <a:p>
             <a:fld id="{71508FFD-BCE4-46BF-8881-AE560EAB6C52}" type="datetimeFigureOut">
               <a:rPr lang="zh-TW" altLang="en-US" smtClean="0"/>
-              <a:t>2025/5/1</a:t>
+              <a:t>2025/5/2</a:t>
             </a:fld>
             <a:endParaRPr lang="zh-TW" altLang="en-US"/>
           </a:p>
@@ -1810,7 +1815,7 @@
           <a:p>
             <a:fld id="{71508FFD-BCE4-46BF-8881-AE560EAB6C52}" type="datetimeFigureOut">
               <a:rPr lang="zh-TW" altLang="en-US" smtClean="0"/>
-              <a:t>2025/5/1</a:t>
+              <a:t>2025/5/2</a:t>
             </a:fld>
             <a:endParaRPr lang="zh-TW" altLang="en-US"/>
           </a:p>
@@ -1951,7 +1956,7 @@
           <a:p>
             <a:fld id="{71508FFD-BCE4-46BF-8881-AE560EAB6C52}" type="datetimeFigureOut">
               <a:rPr lang="zh-TW" altLang="en-US" smtClean="0"/>
-              <a:t>2025/5/1</a:t>
+              <a:t>2025/5/2</a:t>
             </a:fld>
             <a:endParaRPr lang="zh-TW" altLang="en-US"/>
           </a:p>
@@ -2064,7 +2069,7 @@
           <a:p>
             <a:fld id="{71508FFD-BCE4-46BF-8881-AE560EAB6C52}" type="datetimeFigureOut">
               <a:rPr lang="zh-TW" altLang="en-US" smtClean="0"/>
-              <a:t>2025/5/1</a:t>
+              <a:t>2025/5/2</a:t>
             </a:fld>
             <a:endParaRPr lang="zh-TW" altLang="en-US"/>
           </a:p>
@@ -2375,7 +2380,7 @@
           <a:p>
             <a:fld id="{71508FFD-BCE4-46BF-8881-AE560EAB6C52}" type="datetimeFigureOut">
               <a:rPr lang="zh-TW" altLang="en-US" smtClean="0"/>
-              <a:t>2025/5/1</a:t>
+              <a:t>2025/5/2</a:t>
             </a:fld>
             <a:endParaRPr lang="zh-TW" altLang="en-US"/>
           </a:p>
@@ -2663,7 +2668,7 @@
           <a:p>
             <a:fld id="{71508FFD-BCE4-46BF-8881-AE560EAB6C52}" type="datetimeFigureOut">
               <a:rPr lang="zh-TW" altLang="en-US" smtClean="0"/>
-              <a:t>2025/5/1</a:t>
+              <a:t>2025/5/2</a:t>
             </a:fld>
             <a:endParaRPr lang="zh-TW" altLang="en-US"/>
           </a:p>
@@ -2904,7 +2909,7 @@
           <a:p>
             <a:fld id="{71508FFD-BCE4-46BF-8881-AE560EAB6C52}" type="datetimeFigureOut">
               <a:rPr lang="zh-TW" altLang="en-US" smtClean="0"/>
-              <a:t>2025/5/1</a:t>
+              <a:t>2025/5/2</a:t>
             </a:fld>
             <a:endParaRPr lang="zh-TW" altLang="en-US"/>
           </a:p>
@@ -3339,12 +3344,14 @@
         </p:nvSpPr>
         <p:spPr>
           <a:xfrm>
-            <a:off x="606793" y="537837"/>
-            <a:ext cx="10978415" cy="5782327"/>
+            <a:off x="449512" y="537837"/>
+            <a:ext cx="11292977" cy="5782327"/>
           </a:xfrm>
         </p:spPr>
         <p:txBody>
-          <a:bodyPr/>
+          <a:bodyPr>
+            <a:normAutofit/>
+          </a:bodyPr>
           <a:lstStyle/>
           <a:p>
             <a:r>
@@ -3362,7 +3369,19 @@
             </a:r>
             <a:r>
               <a:rPr lang="en-US" altLang="zh-TW" dirty="0"/>
-              <a:t> Title Category State Love Series Warrant tag Link Introduction</a:t>
+              <a:t> Title Category State Love Series</a:t>
+            </a:r>
+            <a:r>
+              <a:rPr lang="zh-TW" altLang="en-US" dirty="0"/>
+              <a:t> </a:t>
+            </a:r>
+            <a:r>
+              <a:rPr lang="en-US" altLang="zh-TW" dirty="0" err="1"/>
+              <a:t>SeriesN</a:t>
+            </a:r>
+            <a:r>
+              <a:rPr lang="en-US" altLang="zh-TW" dirty="0"/>
+              <a:t> Warrant Tag Link Introduction</a:t>
             </a:r>
           </a:p>
           <a:p>
@@ -3457,8 +3476,8 @@
         </p:nvSpPr>
         <p:spPr>
           <a:xfrm>
-            <a:off x="1423378" y="1555069"/>
-            <a:ext cx="727969" cy="259200"/>
+            <a:off x="1206567" y="1555069"/>
+            <a:ext cx="773062" cy="259200"/>
           </a:xfrm>
           <a:prstGeom prst="curvedUpArrow">
             <a:avLst/>
@@ -3507,7 +3526,7 @@
         </p:nvSpPr>
         <p:spPr>
           <a:xfrm>
-            <a:off x="1423378" y="1555069"/>
+            <a:off x="1206566" y="1555069"/>
             <a:ext cx="2929632" cy="259200"/>
           </a:xfrm>
           <a:prstGeom prst="curvedUpArrow">
@@ -3557,8 +3576,8 @@
         </p:nvSpPr>
         <p:spPr>
           <a:xfrm>
-            <a:off x="1423378" y="1555069"/>
-            <a:ext cx="1664563" cy="259200"/>
+            <a:off x="1206566" y="1555069"/>
+            <a:ext cx="1810011" cy="259200"/>
           </a:xfrm>
           <a:prstGeom prst="curvedUpArrow">
             <a:avLst/>
@@ -3607,7 +3626,7 @@
         </p:nvSpPr>
         <p:spPr>
           <a:xfrm>
-            <a:off x="1423378" y="1555069"/>
+            <a:off x="1206566" y="1555069"/>
             <a:ext cx="3752144" cy="259200"/>
           </a:xfrm>
           <a:prstGeom prst="curvedUpArrow">
@@ -3657,7 +3676,7 @@
         </p:nvSpPr>
         <p:spPr>
           <a:xfrm>
-            <a:off x="1423378" y="1555070"/>
+            <a:off x="1206566" y="1555070"/>
             <a:ext cx="4666698" cy="259200"/>
           </a:xfrm>
           <a:prstGeom prst="curvedUpArrow">
@@ -3707,8 +3726,8 @@
         </p:nvSpPr>
         <p:spPr>
           <a:xfrm>
-            <a:off x="1423378" y="1555070"/>
-            <a:ext cx="6063452" cy="259200"/>
+            <a:off x="1206566" y="1555070"/>
+            <a:ext cx="5693855" cy="259200"/>
           </a:xfrm>
           <a:prstGeom prst="curvedUpArrow">
             <a:avLst/>
@@ -3757,7 +3776,7 @@
         </p:nvSpPr>
         <p:spPr>
           <a:xfrm>
-            <a:off x="1423378" y="1555069"/>
+            <a:off x="1206566" y="1555069"/>
             <a:ext cx="6815100" cy="259200"/>
           </a:xfrm>
           <a:prstGeom prst="curvedUpArrow">
@@ -3807,8 +3826,8 @@
         </p:nvSpPr>
         <p:spPr>
           <a:xfrm>
-            <a:off x="1423378" y="1555070"/>
-            <a:ext cx="7377344" cy="259200"/>
+            <a:off x="1206565" y="1555070"/>
+            <a:ext cx="8323933" cy="259200"/>
           </a:xfrm>
           <a:prstGeom prst="curvedUpArrow">
             <a:avLst/>
@@ -3857,8 +3876,8 @@
         </p:nvSpPr>
         <p:spPr>
           <a:xfrm>
-            <a:off x="1423378" y="1555069"/>
-            <a:ext cx="8919107" cy="259200"/>
+            <a:off x="1206566" y="1555069"/>
+            <a:ext cx="9530564" cy="259200"/>
           </a:xfrm>
           <a:prstGeom prst="curvedUpArrow">
             <a:avLst/>
@@ -3907,8 +3926,8 @@
         </p:nvSpPr>
         <p:spPr>
           <a:xfrm>
-            <a:off x="1265068" y="3108664"/>
-            <a:ext cx="1025371" cy="291484"/>
+            <a:off x="1206563" y="3108664"/>
+            <a:ext cx="905042" cy="291484"/>
           </a:xfrm>
           <a:prstGeom prst="curvedUpArrow">
             <a:avLst/>
@@ -3957,8 +3976,8 @@
         </p:nvSpPr>
         <p:spPr>
           <a:xfrm>
-            <a:off x="1186649" y="4593929"/>
-            <a:ext cx="1103790" cy="291484"/>
+            <a:off x="1206563" y="4593929"/>
+            <a:ext cx="905042" cy="291484"/>
           </a:xfrm>
           <a:prstGeom prst="curvedUpArrow">
             <a:avLst/>
@@ -4007,8 +4026,58 @@
         </p:nvSpPr>
         <p:spPr>
           <a:xfrm>
-            <a:off x="1265068" y="6204755"/>
-            <a:ext cx="1522520" cy="291485"/>
+            <a:off x="1206564" y="6204755"/>
+            <a:ext cx="1385808" cy="291485"/>
+          </a:xfrm>
+          <a:prstGeom prst="curvedUpArrow">
+            <a:avLst/>
+          </a:prstGeom>
+        </p:spPr>
+        <p:style>
+          <a:lnRef idx="2">
+            <a:schemeClr val="accent1">
+              <a:shade val="15000"/>
+            </a:schemeClr>
+          </a:lnRef>
+          <a:fillRef idx="1">
+            <a:schemeClr val="accent1"/>
+          </a:fillRef>
+          <a:effectRef idx="0">
+            <a:schemeClr val="accent1"/>
+          </a:effectRef>
+          <a:fontRef idx="minor">
+            <a:schemeClr val="lt1"/>
+          </a:fontRef>
+        </p:style>
+        <p:txBody>
+          <a:bodyPr rtlCol="0" anchor="ctr"/>
+          <a:lstStyle/>
+          <a:p>
+            <a:pPr algn="ctr"/>
+            <a:endParaRPr lang="zh-TW" altLang="en-US">
+              <a:solidFill>
+                <a:schemeClr val="tx1"/>
+              </a:solidFill>
+            </a:endParaRPr>
+          </a:p>
+        </p:txBody>
+      </p:sp>
+      <p:sp>
+        <p:nvSpPr>
+          <p:cNvPr id="20" name="箭號: 弧形上彎 19">
+            <a:extLst>
+              <a:ext uri="{FF2B5EF4-FFF2-40B4-BE49-F238E27FC236}">
+                <a16:creationId xmlns:a16="http://schemas.microsoft.com/office/drawing/2014/main" id="{33E79FEA-6D26-4FA9-B2B7-3FF4BD0B2E36}"/>
+              </a:ext>
+            </a:extLst>
+          </p:cNvPr>
+          <p:cNvSpPr/>
+          <p:nvPr/>
+        </p:nvSpPr>
+        <p:spPr>
+          <a:xfrm>
+            <a:off x="1206563" y="1555069"/>
+            <a:ext cx="7711193" cy="259200"/>
           </a:xfrm>
           <a:prstGeom prst="curvedUpArrow">
             <a:avLst/>
